--- a/assets/pptx/catalog-184.pptx
+++ b/assets/pptx/catalog-184.pptx
@@ -3550,7 +3550,7 @@
                 <a:ea typeface="Ebrima"/>
                 <a:cs typeface="Ebrima"/>
               </a:rPr>
-              <a:t>የእኔም ህይወት በእግዚአብሔር እጅ ዋለ (2x)</a:t>
+              <a:t>የእኔም ህይወት በእግዚአብሔር እጅ ዋለ 2x</a:t>
             </a:r>
           </a:p>
         </p:txBody>
@@ -3671,7 +3671,7 @@
                 <a:ea typeface="Ebrima"/>
                 <a:cs typeface="Ebrima"/>
               </a:rPr>
-              <a:t>እግዚሀብሄር ነው በእውነት (2x)</a:t>
+              <a:t>እግዚሀብሄር ነው በእውነት 2x</a:t>
             </a:r>
           </a:p>
         </p:txBody>
@@ -3792,7 +3792,7 @@
                 <a:ea typeface="Ebrima"/>
                 <a:cs typeface="Ebrima"/>
               </a:rPr>
-              <a:t>እኔ የእኔ አይደለሁም (2x)</a:t>
+              <a:t>እኔ የእኔ አይደለሁም 2x</a:t>
             </a:r>
           </a:p>
         </p:txBody>
@@ -3913,7 +3913,7 @@
                 <a:ea typeface="Ebrima"/>
                 <a:cs typeface="Ebrima"/>
               </a:rPr>
-              <a:t>ይሁን አሜን ይሁንልኝ (2x)</a:t>
+              <a:t>ይሁን አሜን ይሁንልኝ 2x</a:t>
             </a:r>
           </a:p>
         </p:txBody>
@@ -4034,7 +4034,7 @@
                 <a:ea typeface="Ebrima"/>
                 <a:cs typeface="Ebrima"/>
               </a:rPr>
-              <a:t>ይሁን ይሁን ብለህ ብቻ አበጀኸልን (2x)</a:t>
+              <a:t>ይሁን ይሁን ብለህ ብቻ አበጀኸልን 2x</a:t>
             </a:r>
           </a:p>
         </p:txBody>
@@ -4155,7 +4155,7 @@
                 <a:ea typeface="Ebrima"/>
                 <a:cs typeface="Ebrima"/>
               </a:rPr>
-              <a:t>አንተ እንዳሰብከው እንዳየህለት (2x)</a:t>
+              <a:t>አንተ እንዳሰብከው እንዳየህለት 2x</a:t>
             </a:r>
           </a:p>
         </p:txBody>
@@ -4518,7 +4518,7 @@
                 <a:ea typeface="Ebrima"/>
                 <a:cs typeface="Ebrima"/>
               </a:rPr>
-              <a:t>እኔ የእኔ አይደለሁም (2x)</a:t>
+              <a:t>እኔ የእኔ አይደለሁም 2x</a:t>
             </a:r>
           </a:p>
         </p:txBody>
@@ -4760,7 +4760,7 @@
                 <a:ea typeface="Ebrima"/>
                 <a:cs typeface="Ebrima"/>
               </a:rPr>
-              <a:t>ይሁን አሜን ይሁንልኝ (2x)</a:t>
+              <a:t>ይሁን አሜን ይሁንልኝ 2x</a:t>
             </a:r>
           </a:p>
         </p:txBody>
@@ -4881,7 +4881,7 @@
                 <a:ea typeface="Ebrima"/>
                 <a:cs typeface="Ebrima"/>
               </a:rPr>
-              <a:t>እግዚአብሔር ነው በእውነት (2x)</a:t>
+              <a:t>እግዚአብሔር ነው በእውነት 2x</a:t>
             </a:r>
           </a:p>
         </p:txBody>
